--- a/decks/englang-opinion/englang-opinion_ch4_review-structure.pptx
+++ b/decks/englang-opinion/englang-opinion_ch4_review-structure.pptx
@@ -124,29 +124,29 @@
   <p:extLst>
     <p:ext uri="{521415D9-36F7-43E2-AB2F-B90AF26B5E84}">
       <p14:sectionLst xmlns:p14="http://schemas.microsoft.com/office/powerpoint/2010/main">
-        <p14:section name="Opening" id="{0c307de7-4cf0-187f-0594-562bfc12f813}">
+        <p14:section name="Opening" id="{44f97fb4-2a7a-e963-9cd3-a0ea27db21e8}">
           <p14:sldIdLst>
             <p14:sldId id="256"/>
           </p14:sldIdLst>
         </p14:section>
-        <p14:section name="Gate" id="{b808b82f-b3b0-42d0-fb62-5196637b547c}">
+        <p14:section name="Gate" id="{7efdf10b-411c-7ae0-6681-331b7d26b35c}">
           <p14:sldIdLst>
             <p14:sldId id="257"/>
             <p14:sldId id="258"/>
           </p14:sldIdLst>
         </p14:section>
-        <p14:section name="Pre-teach" id="{0ca8164d-aac2-3f00-9ff2-f008de6509e2}">
+        <p14:section name="Pre-teach" id="{6395d723-0113-7627-663e-e0454b2e3b4d}">
           <p14:sldIdLst>
             <p14:sldId id="259"/>
           </p14:sldIdLst>
         </p14:section>
-        <p14:section name="Read-along" id="{2cbe17af-0508-7e00-be3b-70e1887e557a}">
+        <p14:section name="Read-along" id="{6c625f7b-ed65-9c3b-0c22-903c74da5b90}">
           <p14:sldIdLst>
             <p14:sldId id="260"/>
             <p14:sldId id="261"/>
           </p14:sldIdLst>
         </p14:section>
-        <p14:section name="Teach" id="{31317926-e666-ea3f-98fe-57b11455478e}">
+        <p14:section name="Teach" id="{b8a2e777-5e60-b5e3-8bc1-a50c3c1704ec}">
           <p14:sldIdLst>
             <p14:sldId id="262"/>
             <p14:sldId id="263"/>
@@ -154,7 +154,7 @@
             <p14:sldId id="265"/>
           </p14:sldIdLst>
         </p14:section>
-        <p14:section name="Routes" id="{5c962c5a-5764-66f4-30ff-e75deecc807e}">
+        <p14:section name="Routes" id="{f8d69e8a-aa44-1750-ca60-ce67bdd602f6}">
           <p14:sldIdLst>
             <p14:sldId id="266"/>
             <p14:sldId id="267"/>
@@ -162,12 +162,12 @@
             <p14:sldId id="269"/>
           </p14:sldIdLst>
         </p14:section>
-        <p14:section name="Close" id="{88838ea5-aa96-75ff-359d-7eecf426b312}">
+        <p14:section name="Close" id="{783103a6-e1dd-d49b-8a26-1f147c8c4487}">
           <p14:sldIdLst>
             <p14:sldId id="270"/>
           </p14:sldIdLst>
         </p14:section>
-        <p14:section name="Answers" id="{3aeeaba5-4b32-3779-5405-e9efc626d0f8}">
+        <p14:section name="Answers" id="{da546ad2-ad77-e3f0-8da6-3d24f0b5edcb}">
           <p14:sldIdLst>
             <p14:sldId id="271"/>
             <p14:sldId id="272"/>
@@ -8890,7 +8890,7 @@
                 <a:ea typeface="Calibri" pitchFamily="34" charset="-122"/>
                 <a:cs typeface="Calibri" pitchFamily="34" charset="-120"/>
               </a:rPr>
-              <a:t>24</a:t>
+              <a:t>80</a:t>
             </a:r>
             <a:endParaRPr lang="en-US" sz="2400" dirty="0"/>
           </a:p>
@@ -8964,7 +8964,7 @@
                 <a:ea typeface="Calibri" pitchFamily="34" charset="-122"/>
                 <a:cs typeface="Calibri" pitchFamily="34" charset="-120"/>
               </a:rPr>
-              <a:t>80</a:t>
+              <a:t>24</a:t>
             </a:r>
             <a:endParaRPr lang="en-US" sz="2400" dirty="0"/>
           </a:p>
@@ -11191,7 +11191,7 @@
                 <a:ea typeface="Calibri" pitchFamily="34" charset="-122"/>
                 <a:cs typeface="Calibri" pitchFamily="34" charset="-120"/>
               </a:rPr>
-              <a:t>24</a:t>
+              <a:t>80</a:t>
             </a:r>
             <a:endParaRPr lang="en-US" sz="2400" dirty="0"/>
           </a:p>
@@ -11265,7 +11265,7 @@
                 <a:ea typeface="Calibri" pitchFamily="34" charset="-122"/>
                 <a:cs typeface="Calibri" pitchFamily="34" charset="-120"/>
               </a:rPr>
-              <a:t>80</a:t>
+              <a:t>24</a:t>
             </a:r>
             <a:endParaRPr lang="en-US" sz="2400" dirty="0"/>
           </a:p>
@@ -11704,7 +11704,7 @@
                 <a:ea typeface="Calibri" pitchFamily="34" charset="-122"/>
                 <a:cs typeface="Calibri" pitchFamily="34" charset="-120"/>
               </a:rPr>
-              <a:t>Spelling and punctuation only</a:t>
+              <a:t>Neat handwriting</a:t>
             </a:r>
             <a:endParaRPr lang="en-US" sz="1800" dirty="0"/>
           </a:p>
@@ -11741,7 +11741,7 @@
                 <a:ea typeface="Calibri" pitchFamily="34" charset="-122"/>
                 <a:cs typeface="Calibri" pitchFamily="34" charset="-120"/>
               </a:rPr>
-              <a:t>Neat handwriting</a:t>
+              <a:t>Writing as many pages as possible</a:t>
             </a:r>
             <a:endParaRPr lang="en-US" sz="1800" dirty="0"/>
           </a:p>
@@ -11778,7 +11778,7 @@
                 <a:ea typeface="Calibri" pitchFamily="34" charset="-122"/>
                 <a:cs typeface="Calibri" pitchFamily="34" charset="-120"/>
               </a:rPr>
-              <a:t>Writing as many pages as possible</a:t>
+              <a:t>Spelling and punctuation only</a:t>
             </a:r>
             <a:endParaRPr lang="en-US" sz="1800" dirty="0"/>
           </a:p>

--- a/decks/englang-opinion/englang-opinion_ch4_review-structure.pptx
+++ b/decks/englang-opinion/englang-opinion_ch4_review-structure.pptx
@@ -124,29 +124,29 @@
   <p:extLst>
     <p:ext uri="{521415D9-36F7-43E2-AB2F-B90AF26B5E84}">
       <p14:sectionLst xmlns:p14="http://schemas.microsoft.com/office/powerpoint/2010/main">
-        <p14:section name="Opening" id="{44f97fb4-2a7a-e963-9cd3-a0ea27db21e8}">
+        <p14:section name="Opening" id="{8c43d1fc-869b-9a32-4013-af9d64a73b28}">
           <p14:sldIdLst>
             <p14:sldId id="256"/>
           </p14:sldIdLst>
         </p14:section>
-        <p14:section name="Gate" id="{7efdf10b-411c-7ae0-6681-331b7d26b35c}">
+        <p14:section name="Gate" id="{01e6a182-a444-4362-1d80-841143be4193}">
           <p14:sldIdLst>
             <p14:sldId id="257"/>
             <p14:sldId id="258"/>
           </p14:sldIdLst>
         </p14:section>
-        <p14:section name="Pre-teach" id="{6395d723-0113-7627-663e-e0454b2e3b4d}">
+        <p14:section name="Pre-teach" id="{18ba3d21-98fa-7104-e7dd-1b52708f5f83}">
           <p14:sldIdLst>
             <p14:sldId id="259"/>
           </p14:sldIdLst>
         </p14:section>
-        <p14:section name="Read-along" id="{6c625f7b-ed65-9c3b-0c22-903c74da5b90}">
+        <p14:section name="Read-along" id="{71855b22-b096-d225-e568-5750c5e6ed52}">
           <p14:sldIdLst>
             <p14:sldId id="260"/>
             <p14:sldId id="261"/>
           </p14:sldIdLst>
         </p14:section>
-        <p14:section name="Teach" id="{b8a2e777-5e60-b5e3-8bc1-a50c3c1704ec}">
+        <p14:section name="Teach" id="{d8eec4b9-bf61-e653-5afb-9ed5d3704155}">
           <p14:sldIdLst>
             <p14:sldId id="262"/>
             <p14:sldId id="263"/>
@@ -154,7 +154,7 @@
             <p14:sldId id="265"/>
           </p14:sldIdLst>
         </p14:section>
-        <p14:section name="Routes" id="{f8d69e8a-aa44-1750-ca60-ce67bdd602f6}">
+        <p14:section name="Routes" id="{2d4d1c04-8b8b-9cdf-6da6-dd254b0b83fa}">
           <p14:sldIdLst>
             <p14:sldId id="266"/>
             <p14:sldId id="267"/>
@@ -162,12 +162,12 @@
             <p14:sldId id="269"/>
           </p14:sldIdLst>
         </p14:section>
-        <p14:section name="Close" id="{783103a6-e1dd-d49b-8a26-1f147c8c4487}">
+        <p14:section name="Close" id="{18cd9ad3-c0e3-99ff-6d31-8754732575ca}">
           <p14:sldIdLst>
             <p14:sldId id="270"/>
           </p14:sldIdLst>
         </p14:section>
-        <p14:section name="Answers" id="{da546ad2-ad77-e3f0-8da6-3d24f0b5edcb}">
+        <p14:section name="Answers" id="{c2a0aaa3-97e6-6742-e3b2-f95b4c5e0dee}">
           <p14:sldIdLst>
             <p14:sldId id="271"/>
             <p14:sldId id="272"/>
